--- a/Fase4/03_results/FaseC/ComparacionPID_vs_RL_F4C_Agente300.pptx
+++ b/Fase4/03_results/FaseC/ComparacionPID_vs_RL_F4C_Agente300.pptx
@@ -104,6 +104,11 @@
       </a:defRPr>
     </a:lvl9pPr>
   </p:defaultTextStyle>
+  <p:extLst>
+    <p:ext uri="{EFAFB233-063F-42B5-8137-9DF3F51BA10A}">
+      <p15:sldGuideLst xmlns:p15="http://schemas.microsoft.com/office/powerpoint/2012/main"/>
+    </p:ext>
+  </p:extLst>
 </p:presentation>
 </file>
 
@@ -256,7 +261,7 @@
           <a:p>
             <a:fld id="{5A0864B3-7B08-5147-BF22-49C6C9D7529C}" type="datetimeFigureOut">
               <a:rPr lang="es-ES_tradnl" smtClean="0"/>
-              <a:t>12/4/26</a:t>
+              <a:t>13/4/26</a:t>
             </a:fld>
             <a:endParaRPr lang="es-ES_tradnl"/>
           </a:p>
@@ -456,7 +461,7 @@
           <a:p>
             <a:fld id="{5A0864B3-7B08-5147-BF22-49C6C9D7529C}" type="datetimeFigureOut">
               <a:rPr lang="es-ES_tradnl" smtClean="0"/>
-              <a:t>12/4/26</a:t>
+              <a:t>13/4/26</a:t>
             </a:fld>
             <a:endParaRPr lang="es-ES_tradnl"/>
           </a:p>
@@ -666,7 +671,7 @@
           <a:p>
             <a:fld id="{5A0864B3-7B08-5147-BF22-49C6C9D7529C}" type="datetimeFigureOut">
               <a:rPr lang="es-ES_tradnl" smtClean="0"/>
-              <a:t>12/4/26</a:t>
+              <a:t>13/4/26</a:t>
             </a:fld>
             <a:endParaRPr lang="es-ES_tradnl"/>
           </a:p>
@@ -1278,7 +1283,7 @@
           <a:p>
             <a:fld id="{5A0864B3-7B08-5147-BF22-49C6C9D7529C}" type="datetimeFigureOut">
               <a:rPr lang="es-ES_tradnl" smtClean="0"/>
-              <a:t>12/4/26</a:t>
+              <a:t>13/4/26</a:t>
             </a:fld>
             <a:endParaRPr lang="es-ES_tradnl"/>
           </a:p>
@@ -1554,7 +1559,7 @@
           <a:p>
             <a:fld id="{5A0864B3-7B08-5147-BF22-49C6C9D7529C}" type="datetimeFigureOut">
               <a:rPr lang="es-ES_tradnl" smtClean="0"/>
-              <a:t>12/4/26</a:t>
+              <a:t>13/4/26</a:t>
             </a:fld>
             <a:endParaRPr lang="es-ES_tradnl"/>
           </a:p>
@@ -1822,7 +1827,7 @@
           <a:p>
             <a:fld id="{5A0864B3-7B08-5147-BF22-49C6C9D7529C}" type="datetimeFigureOut">
               <a:rPr lang="es-ES_tradnl" smtClean="0"/>
-              <a:t>12/4/26</a:t>
+              <a:t>13/4/26</a:t>
             </a:fld>
             <a:endParaRPr lang="es-ES_tradnl"/>
           </a:p>
@@ -2237,7 +2242,7 @@
           <a:p>
             <a:fld id="{5A0864B3-7B08-5147-BF22-49C6C9D7529C}" type="datetimeFigureOut">
               <a:rPr lang="es-ES_tradnl" smtClean="0"/>
-              <a:t>12/4/26</a:t>
+              <a:t>13/4/26</a:t>
             </a:fld>
             <a:endParaRPr lang="es-ES_tradnl"/>
           </a:p>
@@ -2379,7 +2384,7 @@
           <a:p>
             <a:fld id="{5A0864B3-7B08-5147-BF22-49C6C9D7529C}" type="datetimeFigureOut">
               <a:rPr lang="es-ES_tradnl" smtClean="0"/>
-              <a:t>12/4/26</a:t>
+              <a:t>13/4/26</a:t>
             </a:fld>
             <a:endParaRPr lang="es-ES_tradnl"/>
           </a:p>
@@ -2492,7 +2497,7 @@
           <a:p>
             <a:fld id="{5A0864B3-7B08-5147-BF22-49C6C9D7529C}" type="datetimeFigureOut">
               <a:rPr lang="es-ES_tradnl" smtClean="0"/>
-              <a:t>12/4/26</a:t>
+              <a:t>13/4/26</a:t>
             </a:fld>
             <a:endParaRPr lang="es-ES_tradnl"/>
           </a:p>
@@ -2805,7 +2810,7 @@
           <a:p>
             <a:fld id="{5A0864B3-7B08-5147-BF22-49C6C9D7529C}" type="datetimeFigureOut">
               <a:rPr lang="es-ES_tradnl" smtClean="0"/>
-              <a:t>12/4/26</a:t>
+              <a:t>13/4/26</a:t>
             </a:fld>
             <a:endParaRPr lang="es-ES_tradnl"/>
           </a:p>
@@ -3094,7 +3099,7 @@
           <a:p>
             <a:fld id="{5A0864B3-7B08-5147-BF22-49C6C9D7529C}" type="datetimeFigureOut">
               <a:rPr lang="es-ES_tradnl" smtClean="0"/>
-              <a:t>12/4/26</a:t>
+              <a:t>13/4/26</a:t>
             </a:fld>
             <a:endParaRPr lang="es-ES_tradnl"/>
           </a:p>
@@ -3337,7 +3342,7 @@
           <a:p>
             <a:fld id="{5A0864B3-7B08-5147-BF22-49C6C9D7529C}" type="datetimeFigureOut">
               <a:rPr lang="es-ES_tradnl" smtClean="0"/>
-              <a:t>12/4/26</a:t>
+              <a:t>13/4/26</a:t>
             </a:fld>
             <a:endParaRPr lang="es-ES_tradnl"/>
           </a:p>
@@ -3798,74 +3803,6 @@
       </p:sp>
       <p:sp>
         <p:nvSpPr>
-          <p:cNvPr id="16" name="Textfeld 15">
-            <a:extLst>
-              <a:ext uri="{FF2B5EF4-FFF2-40B4-BE49-F238E27FC236}">
-                <a16:creationId xmlns:a16="http://schemas.microsoft.com/office/drawing/2014/main" id="{8B6FC092-3F27-6510-8286-0E416A41044A}"/>
-              </a:ext>
-            </a:extLst>
-          </p:cNvPr>
-          <p:cNvSpPr txBox="1"/>
-          <p:nvPr/>
-        </p:nvSpPr>
-        <p:spPr>
-          <a:xfrm>
-            <a:off x="955202" y="5190269"/>
-            <a:ext cx="9999309" cy="1169551"/>
-          </a:xfrm>
-          <a:prstGeom prst="rect">
-            <a:avLst/>
-          </a:prstGeom>
-          <a:noFill/>
-        </p:spPr>
-        <p:txBody>
-          <a:bodyPr wrap="square">
-            <a:spAutoFit/>
-          </a:bodyPr>
-          <a:lstStyle/>
-          <a:p>
-            <a:pPr marL="171450" indent="-171450">
-              <a:buFont typeface="Symbol" pitchFamily="2" charset="2"/>
-              <a:buChar char="-"/>
-            </a:pPr>
-            <a:r>
-              <a:rPr lang="es-ES_tradnl" sz="1400" noProof="1">
-                <a:latin typeface="Times New Roman" panose="02020603050405020304" pitchFamily="18" charset="0"/>
-                <a:cs typeface="Times New Roman" panose="02020603050405020304" pitchFamily="18" charset="0"/>
-              </a:rPr>
-              <a:t>El controlador RL alcanza desempeño comparable al PID en plataforma plana (RMSE ≈31° en ambos casos).</a:t>
-            </a:r>
-          </a:p>
-          <a:p>
-            <a:pPr marL="171450" indent="-171450">
-              <a:buFont typeface="Symbol" pitchFamily="2" charset="2"/>
-              <a:buChar char="-"/>
-            </a:pPr>
-            <a:r>
-              <a:rPr lang="es-ES_tradnl" sz="1400" noProof="1">
-                <a:latin typeface="Times New Roman" panose="02020603050405020304" pitchFamily="18" charset="0"/>
-                <a:cs typeface="Times New Roman" panose="02020603050405020304" pitchFamily="18" charset="0"/>
-              </a:rPr>
-              <a:t>Bajo inclinación, el RL reduce el error frente al PID (≈36.25° vs ≈40.55°, −10.6%), evidenciando mejor adaptación a perturbaciones gravitacionales.</a:t>
-            </a:r>
-          </a:p>
-          <a:p>
-            <a:pPr marL="171450" indent="-171450">
-              <a:buFont typeface="Symbol" pitchFamily="2" charset="2"/>
-              <a:buChar char="-"/>
-            </a:pPr>
-            <a:r>
-              <a:rPr lang="es-ES_tradnl" sz="1400" noProof="1">
-                <a:latin typeface="Times New Roman" panose="02020603050405020304" pitchFamily="18" charset="0"/>
-                <a:cs typeface="Times New Roman" panose="02020603050405020304" pitchFamily="18" charset="0"/>
-              </a:rPr>
-              <a:t>El PID presenta una respuesta más suave, pero el RL muestra mayor robustez y capacidad de generalización en condiciones no nominales.</a:t>
-            </a:r>
-          </a:p>
-        </p:txBody>
-      </p:sp>
-      <p:sp>
-        <p:nvSpPr>
           <p:cNvPr id="19" name="Textfeld 18">
             <a:extLst>
               <a:ext uri="{FF2B5EF4-FFF2-40B4-BE49-F238E27FC236}">
@@ -4149,6 +4086,102 @@
           </a:prstGeom>
         </p:spPr>
       </p:pic>
+      <p:sp>
+        <p:nvSpPr>
+          <p:cNvPr id="5" name="Textfeld 4">
+            <a:extLst>
+              <a:ext uri="{FF2B5EF4-FFF2-40B4-BE49-F238E27FC236}">
+                <a16:creationId xmlns:a16="http://schemas.microsoft.com/office/drawing/2014/main" id="{B7AD0F18-E31C-8FD1-2EA8-20FC5C49C7BF}"/>
+              </a:ext>
+            </a:extLst>
+          </p:cNvPr>
+          <p:cNvSpPr txBox="1"/>
+          <p:nvPr/>
+        </p:nvSpPr>
+        <p:spPr>
+          <a:xfrm>
+            <a:off x="892098" y="5190269"/>
+            <a:ext cx="10627112" cy="1169551"/>
+          </a:xfrm>
+          <a:prstGeom prst="rect">
+            <a:avLst/>
+          </a:prstGeom>
+          <a:noFill/>
+        </p:spPr>
+        <p:txBody>
+          <a:bodyPr wrap="square">
+            <a:spAutoFit/>
+          </a:bodyPr>
+          <a:lstStyle/>
+          <a:p>
+            <a:pPr marL="285750" indent="-285750">
+              <a:buFont typeface="Symbol" pitchFamily="2" charset="2"/>
+              <a:buChar char="-"/>
+            </a:pPr>
+            <a:r>
+              <a:rPr lang="es-ES_tradnl" sz="1400" dirty="0">
+                <a:latin typeface="Times New Roman" panose="02020603050405020304" pitchFamily="18" charset="0"/>
+                <a:cs typeface="Times New Roman" panose="02020603050405020304" pitchFamily="18" charset="0"/>
+              </a:rPr>
+              <a:t>La política neuronal alcanza un desempeño comparable al PID en plataforma plana (</a:t>
+            </a:r>
+            <a:r>
+              <a:rPr lang="de-DE" sz="1400" dirty="0">
+                <a:latin typeface="Times New Roman" panose="02020603050405020304" pitchFamily="18" charset="0"/>
+                <a:cs typeface="Times New Roman" panose="02020603050405020304" pitchFamily="18" charset="0"/>
+              </a:rPr>
+              <a:t>RMSE ≈ 35.09° </a:t>
+            </a:r>
+            <a:r>
+              <a:rPr lang="de-DE" sz="1400" dirty="0" err="1">
+                <a:latin typeface="Times New Roman" panose="02020603050405020304" pitchFamily="18" charset="0"/>
+                <a:cs typeface="Times New Roman" panose="02020603050405020304" pitchFamily="18" charset="0"/>
+              </a:rPr>
+              <a:t>frente</a:t>
+            </a:r>
+            <a:r>
+              <a:rPr lang="de-DE" sz="1400" dirty="0">
+                <a:latin typeface="Times New Roman" panose="02020603050405020304" pitchFamily="18" charset="0"/>
+                <a:cs typeface="Times New Roman" panose="02020603050405020304" pitchFamily="18" charset="0"/>
+              </a:rPr>
+              <a:t> a ≈31.41°</a:t>
+            </a:r>
+            <a:r>
+              <a:rPr lang="es-ES_tradnl" sz="1400" dirty="0">
+                <a:latin typeface="Times New Roman" panose="02020603050405020304" pitchFamily="18" charset="0"/>
+                <a:cs typeface="Times New Roman" panose="02020603050405020304" pitchFamily="18" charset="0"/>
+              </a:rPr>
+              <a:t>).</a:t>
+            </a:r>
+          </a:p>
+          <a:p>
+            <a:pPr marL="285750" indent="-285750">
+              <a:buFont typeface="Symbol" pitchFamily="2" charset="2"/>
+              <a:buChar char="-"/>
+            </a:pPr>
+            <a:r>
+              <a:rPr lang="es-ES_tradnl" sz="1400" dirty="0">
+                <a:latin typeface="Times New Roman" panose="02020603050405020304" pitchFamily="18" charset="0"/>
+                <a:cs typeface="Times New Roman" panose="02020603050405020304" pitchFamily="18" charset="0"/>
+              </a:rPr>
+              <a:t>Bajo inclinación, la política neuronal reduce el error frente al PID (≈35.13° vs ≈40.55°, −13.4%), evidenciando mejor adaptación a perturbaciones gravitacionales.</a:t>
+            </a:r>
+          </a:p>
+          <a:p>
+            <a:pPr marL="285750" indent="-285750">
+              <a:buFont typeface="Symbol" pitchFamily="2" charset="2"/>
+              <a:buChar char="-"/>
+            </a:pPr>
+            <a:r>
+              <a:rPr lang="es-ES_tradnl" sz="1400" dirty="0">
+                <a:latin typeface="Times New Roman" panose="02020603050405020304" pitchFamily="18" charset="0"/>
+                <a:cs typeface="Times New Roman" panose="02020603050405020304" pitchFamily="18" charset="0"/>
+              </a:rPr>
+              <a:t>El PID presenta una respuesta más suave, pero la política neuronal muestra mayor robustez y capacidad de generalización en condiciones no nominales.</a:t>
+            </a:r>
+          </a:p>
+        </p:txBody>
+      </p:sp>
     </p:spTree>
     <p:extLst>
       <p:ext uri="{BB962C8B-B14F-4D97-AF65-F5344CB8AC3E}">

--- a/Fase4/03_results/FaseC/ComparacionPID_vs_RL_F4C_Agente300.pptx
+++ b/Fase4/03_results/FaseC/ComparacionPID_vs_RL_F4C_Agente300.pptx
@@ -4100,8 +4100,8 @@
         </p:nvSpPr>
         <p:spPr>
           <a:xfrm>
-            <a:off x="892098" y="5190269"/>
-            <a:ext cx="10627112" cy="1169551"/>
+            <a:off x="677495" y="5254921"/>
+            <a:ext cx="10627112" cy="1015663"/>
           </a:xfrm>
           <a:prstGeom prst="rect">
             <a:avLst/>
@@ -4119,39 +4119,11 @@
               <a:buChar char="-"/>
             </a:pPr>
             <a:r>
-              <a:rPr lang="es-ES_tradnl" sz="1400" dirty="0">
+              <a:rPr lang="es-ES_tradnl" sz="1200" dirty="0">
                 <a:latin typeface="Times New Roman" panose="02020603050405020304" pitchFamily="18" charset="0"/>
                 <a:cs typeface="Times New Roman" panose="02020603050405020304" pitchFamily="18" charset="0"/>
               </a:rPr>
-              <a:t>La política neuronal alcanza un desempeño comparable al PID en plataforma plana (</a:t>
-            </a:r>
-            <a:r>
-              <a:rPr lang="de-DE" sz="1400" dirty="0">
-                <a:latin typeface="Times New Roman" panose="02020603050405020304" pitchFamily="18" charset="0"/>
-                <a:cs typeface="Times New Roman" panose="02020603050405020304" pitchFamily="18" charset="0"/>
-              </a:rPr>
-              <a:t>RMSE ≈ 35.09° </a:t>
-            </a:r>
-            <a:r>
-              <a:rPr lang="de-DE" sz="1400" dirty="0" err="1">
-                <a:latin typeface="Times New Roman" panose="02020603050405020304" pitchFamily="18" charset="0"/>
-                <a:cs typeface="Times New Roman" panose="02020603050405020304" pitchFamily="18" charset="0"/>
-              </a:rPr>
-              <a:t>frente</a:t>
-            </a:r>
-            <a:r>
-              <a:rPr lang="de-DE" sz="1400" dirty="0">
-                <a:latin typeface="Times New Roman" panose="02020603050405020304" pitchFamily="18" charset="0"/>
-                <a:cs typeface="Times New Roman" panose="02020603050405020304" pitchFamily="18" charset="0"/>
-              </a:rPr>
-              <a:t> a ≈31.41°</a:t>
-            </a:r>
-            <a:r>
-              <a:rPr lang="es-ES_tradnl" sz="1400" dirty="0">
-                <a:latin typeface="Times New Roman" panose="02020603050405020304" pitchFamily="18" charset="0"/>
-                <a:cs typeface="Times New Roman" panose="02020603050405020304" pitchFamily="18" charset="0"/>
-              </a:rPr>
-              <a:t>).</a:t>
+              <a:t>La política neuronal presenta un desempeño inferior al PID en plataforma plana (RMSE ≈ 35.13° frente a ≈ 31.39°), evidenciando menor precisión en condiciones nominales.</a:t>
             </a:r>
           </a:p>
           <a:p>
@@ -4160,11 +4132,11 @@
               <a:buChar char="-"/>
             </a:pPr>
             <a:r>
-              <a:rPr lang="es-ES_tradnl" sz="1400" dirty="0">
+              <a:rPr lang="es-ES_tradnl" sz="1200" dirty="0">
                 <a:latin typeface="Times New Roman" panose="02020603050405020304" pitchFamily="18" charset="0"/>
                 <a:cs typeface="Times New Roman" panose="02020603050405020304" pitchFamily="18" charset="0"/>
               </a:rPr>
-              <a:t>Bajo inclinación, la política neuronal reduce el error frente al PID (≈35.13° vs ≈40.55°, −13.4%), evidenciando mejor adaptación a perturbaciones gravitacionales.</a:t>
+              <a:t>Bajo inclinación, la política neuronal reduce el error frente al PID (≈35.13° vs ≈40.55°, −13.4%), mostrando mejor adaptación a perturbaciones gravitacionales.</a:t>
             </a:r>
           </a:p>
           <a:p>
@@ -4173,11 +4145,11 @@
               <a:buChar char="-"/>
             </a:pPr>
             <a:r>
-              <a:rPr lang="es-ES_tradnl" sz="1400" dirty="0">
+              <a:rPr lang="es-ES_tradnl" sz="1200" dirty="0">
                 <a:latin typeface="Times New Roman" panose="02020603050405020304" pitchFamily="18" charset="0"/>
                 <a:cs typeface="Times New Roman" panose="02020603050405020304" pitchFamily="18" charset="0"/>
               </a:rPr>
-              <a:t>El PID presenta una respuesta más suave, pero la política neuronal muestra mayor robustez y capacidad de generalización en condiciones no nominales.</a:t>
+              <a:t>El PID presenta una respuesta más suave, mientras que la política neuronal destaca por su mayor robustez y capacidad de generalización en condiciones no nominales.</a:t>
             </a:r>
           </a:p>
         </p:txBody>
